--- a/ppts/CHAPTER 5 Cognitive Architectures with LangGraph.pptx
+++ b/ppts/CHAPTER 5 Cognitive Architectures with LangGraph.pptx
@@ -264,7 +264,7 @@
                 <a:latin typeface="맑은 고딕" panose="020B0503020000020004" pitchFamily="50" charset="-127"/>
                 <a:ea typeface="맑은 고딕" panose="020B0503020000020004" pitchFamily="50" charset="-127"/>
               </a:rPr>
-              <a:t>2026-08-20</a:t>
+              <a:t>2026-10-03</a:t>
             </a:fld>
             <a:endParaRPr lang="ko-KR" altLang="en-US">
               <a:latin typeface="맑은 고딕" panose="020B0503020000020004" pitchFamily="50" charset="-127"/>
@@ -450,7 +450,7 @@
           <a:p>
             <a:fld id="{43E1C3DD-4A19-441D-907C-380838DB51C4}" type="datetime1">
               <a:rPr lang="ko-KR" altLang="en-US" noProof="0" smtClean="0"/>
-              <a:t>2026-08-20</a:t>
+              <a:t>2026-10-03</a:t>
             </a:fld>
             <a:endParaRPr lang="ko-KR" altLang="en-US" noProof="0"/>
           </a:p>
@@ -1298,7 +1298,7 @@
           <a:p>
             <a:fld id="{990475B5-67CA-4281-BDCA-DA943C3C8EB3}" type="datetime1">
               <a:rPr lang="ko-KR" altLang="en-US" noProof="0" smtClean="0"/>
-              <a:t>2026-08-20</a:t>
+              <a:t>2026-10-03</a:t>
             </a:fld>
             <a:endParaRPr lang="ko-KR" altLang="en-US" noProof="0"/>
           </a:p>
@@ -1952,7 +1952,7 @@
           <a:p>
             <a:fld id="{48A87A34-81AB-432B-8DAE-1953F412C126}" type="datetimeFigureOut">
               <a:rPr lang="en-US" smtClean="0"/>
-              <a:t>8/20/2026</a:t>
+              <a:t>10/3/2026</a:t>
             </a:fld>
             <a:endParaRPr lang="en-US" dirty="0"/>
           </a:p>
@@ -2248,7 +2248,7 @@
           <a:p>
             <a:fld id="{C655C81E-72E7-4D05-94B5-F45B321A525D}" type="datetime1">
               <a:rPr lang="ko-KR" altLang="en-US" noProof="0" smtClean="0"/>
-              <a:t>2026-08-20</a:t>
+              <a:t>2026-10-03</a:t>
             </a:fld>
             <a:endParaRPr lang="ko-KR" altLang="en-US" noProof="0" dirty="0">
               <a:latin typeface="맑은 고딕" panose="020B0503020000020004" pitchFamily="50" charset="-127"/>
@@ -3214,12 +3214,17 @@
         </p:blipFill>
         <p:spPr>
           <a:xfrm>
-            <a:off x="4672315" y="2466821"/>
-            <a:ext cx="2179509" cy="3543607"/>
+            <a:off x="2287930" y="2573623"/>
+            <a:ext cx="2248752" cy="3656187"/>
           </a:xfrm>
           <a:prstGeom prst="rect">
             <a:avLst/>
           </a:prstGeom>
+          <a:ln>
+            <a:solidFill>
+              <a:schemeClr val="tx1"/>
+            </a:solidFill>
+          </a:ln>
         </p:spPr>
       </p:pic>
       <p:sp>
@@ -3323,6 +3328,169 @@
               <a:latin typeface="D2Coding" panose="020B0609020101020101" pitchFamily="49" charset="-127"/>
               <a:ea typeface="D2Coding" panose="020B0609020101020101" pitchFamily="49" charset="-127"/>
             </a:endParaRPr>
+          </a:p>
+        </p:txBody>
+      </p:sp>
+      <p:sp>
+        <p:nvSpPr>
+          <p:cNvPr id="6" name="TextBox 5">
+            <a:extLst>
+              <a:ext uri="{FF2B5EF4-FFF2-40B4-BE49-F238E27FC236}">
+                <a16:creationId xmlns:a16="http://schemas.microsoft.com/office/drawing/2014/main" id="{245D10ED-7BC9-93A8-2B7C-04A310FE411B}"/>
+              </a:ext>
+            </a:extLst>
+          </p:cNvPr>
+          <p:cNvSpPr txBox="1"/>
+          <p:nvPr/>
+        </p:nvSpPr>
+        <p:spPr>
+          <a:xfrm>
+            <a:off x="5049455" y="2530375"/>
+            <a:ext cx="6094070" cy="375649"/>
+          </a:xfrm>
+          <a:prstGeom prst="rect">
+            <a:avLst/>
+          </a:prstGeom>
+          <a:solidFill>
+            <a:schemeClr val="tx1"/>
+          </a:solidFill>
+        </p:spPr>
+        <p:txBody>
+          <a:bodyPr wrap="square">
+            <a:spAutoFit/>
+          </a:bodyPr>
+          <a:lstStyle/>
+          <a:p>
+            <a:r>
+              <a:rPr lang="ko-KR" altLang="en-US" dirty="0" err="1">
+                <a:solidFill>
+                  <a:schemeClr val="bg1"/>
+                </a:solidFill>
+                <a:latin typeface="D2Coding" panose="020B0609020101020101" pitchFamily="49" charset="-127"/>
+                <a:ea typeface="D2Coding" panose="020B0609020101020101" pitchFamily="49" charset="-127"/>
+              </a:rPr>
+              <a:t>Chain</a:t>
+            </a:r>
+            <a:r>
+              <a:rPr lang="ko-KR" altLang="en-US" dirty="0">
+                <a:solidFill>
+                  <a:schemeClr val="bg1"/>
+                </a:solidFill>
+                <a:latin typeface="D2Coding" panose="020B0609020101020101" pitchFamily="49" charset="-127"/>
+                <a:ea typeface="D2Coding" panose="020B0609020101020101" pitchFamily="49" charset="-127"/>
+              </a:rPr>
+              <a:t> </a:t>
+            </a:r>
+            <a:r>
+              <a:rPr lang="en-US" altLang="ko-KR" dirty="0">
+                <a:solidFill>
+                  <a:schemeClr val="bg1"/>
+                </a:solidFill>
+                <a:latin typeface="D2Coding" panose="020B0609020101020101" pitchFamily="49" charset="-127"/>
+                <a:ea typeface="D2Coding" panose="020B0609020101020101" pitchFamily="49" charset="-127"/>
+              </a:rPr>
+              <a:t>: </a:t>
+            </a:r>
+            <a:r>
+              <a:rPr lang="ko-KR" altLang="en-US" dirty="0">
+                <a:solidFill>
+                  <a:schemeClr val="bg1"/>
+                </a:solidFill>
+                <a:latin typeface="D2Coding" panose="020B0609020101020101" pitchFamily="49" charset="-127"/>
+                <a:ea typeface="D2Coding" panose="020B0609020101020101" pitchFamily="49" charset="-127"/>
+              </a:rPr>
+              <a:t>여러 LLM 호출을 순서대로 연결</a:t>
+            </a:r>
+          </a:p>
+        </p:txBody>
+      </p:sp>
+      <p:sp>
+        <p:nvSpPr>
+          <p:cNvPr id="9" name="TextBox 8">
+            <a:extLst>
+              <a:ext uri="{FF2B5EF4-FFF2-40B4-BE49-F238E27FC236}">
+                <a16:creationId xmlns:a16="http://schemas.microsoft.com/office/drawing/2014/main" id="{1C62F366-AF3B-EA2F-A205-DD2CEF7AFE83}"/>
+              </a:ext>
+            </a:extLst>
+          </p:cNvPr>
+          <p:cNvSpPr txBox="1"/>
+          <p:nvPr/>
+        </p:nvSpPr>
+        <p:spPr>
+          <a:xfrm>
+            <a:off x="5049457" y="2906024"/>
+            <a:ext cx="6094068" cy="516167"/>
+          </a:xfrm>
+          <a:prstGeom prst="rect">
+            <a:avLst/>
+          </a:prstGeom>
+          <a:noFill/>
+          <a:ln>
+            <a:solidFill>
+              <a:schemeClr val="tx1"/>
+            </a:solidFill>
+          </a:ln>
+        </p:spPr>
+        <p:txBody>
+          <a:bodyPr wrap="square">
+            <a:spAutoFit/>
+          </a:bodyPr>
+          <a:lstStyle/>
+          <a:p>
+            <a:pPr>
+              <a:lnSpc>
+                <a:spcPct val="200000"/>
+              </a:lnSpc>
+            </a:pPr>
+            <a:r>
+              <a:rPr lang="ko-KR" altLang="en-US" sz="1600" dirty="0">
+                <a:latin typeface="D2Coding" panose="020B0609020101020101" pitchFamily="49" charset="-127"/>
+                <a:ea typeface="D2Coding" panose="020B0609020101020101" pitchFamily="49" charset="-127"/>
+              </a:rPr>
+              <a:t>자연어 질문 → </a:t>
+            </a:r>
+            <a:r>
+              <a:rPr lang="en-US" altLang="ko-KR" sz="1600" dirty="0">
+                <a:latin typeface="D2Coding" panose="020B0609020101020101" pitchFamily="49" charset="-127"/>
+                <a:ea typeface="D2Coding" panose="020B0609020101020101" pitchFamily="49" charset="-127"/>
+              </a:rPr>
+              <a:t>SQL </a:t>
+            </a:r>
+            <a:r>
+              <a:rPr lang="ko-KR" altLang="en-US" sz="1600" dirty="0">
+                <a:latin typeface="D2Coding" panose="020B0609020101020101" pitchFamily="49" charset="-127"/>
+                <a:ea typeface="D2Coding" panose="020B0609020101020101" pitchFamily="49" charset="-127"/>
+              </a:rPr>
+              <a:t>생성 → </a:t>
+            </a:r>
+            <a:r>
+              <a:rPr lang="en-US" altLang="ko-KR" sz="1600" dirty="0">
+                <a:latin typeface="D2Coding" panose="020B0609020101020101" pitchFamily="49" charset="-127"/>
+                <a:ea typeface="D2Coding" panose="020B0609020101020101" pitchFamily="49" charset="-127"/>
+              </a:rPr>
+              <a:t>SQL </a:t>
+            </a:r>
+            <a:r>
+              <a:rPr lang="ko-KR" altLang="en-US" sz="1600" dirty="0">
+                <a:latin typeface="D2Coding" panose="020B0609020101020101" pitchFamily="49" charset="-127"/>
+                <a:ea typeface="D2Coding" panose="020B0609020101020101" pitchFamily="49" charset="-127"/>
+              </a:rPr>
+              <a:t>설명이라는 </a:t>
+            </a:r>
+            <a:r>
+              <a:rPr lang="en-US" altLang="ko-KR" sz="1600" dirty="0">
+                <a:latin typeface="D2Coding" panose="020B0609020101020101" pitchFamily="49" charset="-127"/>
+                <a:ea typeface="D2Coding" panose="020B0609020101020101" pitchFamily="49" charset="-127"/>
+              </a:rPr>
+              <a:t>2</a:t>
+            </a:r>
+            <a:r>
+              <a:rPr lang="ko-KR" altLang="en-US" sz="1600" dirty="0">
+                <a:latin typeface="D2Coding" panose="020B0609020101020101" pitchFamily="49" charset="-127"/>
+                <a:ea typeface="D2Coding" panose="020B0609020101020101" pitchFamily="49" charset="-127"/>
+              </a:rPr>
+              <a:t>단계 파이프라인</a:t>
+            </a:r>
           </a:p>
         </p:txBody>
       </p:sp>
@@ -3476,36 +3644,6 @@
           </a:p>
         </p:txBody>
       </p:sp>
-      <p:pic>
-        <p:nvPicPr>
-          <p:cNvPr id="5" name="그림 4">
-            <a:extLst>
-              <a:ext uri="{FF2B5EF4-FFF2-40B4-BE49-F238E27FC236}">
-                <a16:creationId xmlns:a16="http://schemas.microsoft.com/office/drawing/2014/main" id="{06600A6C-F86E-80A7-23F4-6A9706647904}"/>
-              </a:ext>
-            </a:extLst>
-          </p:cNvPr>
-          <p:cNvPicPr>
-            <a:picLocks noChangeAspect="1"/>
-          </p:cNvPicPr>
-          <p:nvPr/>
-        </p:nvPicPr>
-        <p:blipFill>
-          <a:blip r:embed="rId2"/>
-          <a:stretch>
-            <a:fillRect/>
-          </a:stretch>
-        </p:blipFill>
-        <p:spPr>
-          <a:xfrm>
-            <a:off x="5790965" y="2311422"/>
-            <a:ext cx="5893826" cy="3701348"/>
-          </a:xfrm>
-          <a:prstGeom prst="rect">
-            <a:avLst/>
-          </a:prstGeom>
-        </p:spPr>
-      </p:pic>
       <p:sp>
         <p:nvSpPr>
           <p:cNvPr id="7" name="TextBox 6">
@@ -3647,13 +3785,18 @@
         </p:nvSpPr>
         <p:spPr>
           <a:xfrm>
-            <a:off x="585785" y="2311422"/>
-            <a:ext cx="5057932" cy="3754874"/>
+            <a:off x="585785" y="2585742"/>
+            <a:ext cx="5205180" cy="3539430"/>
           </a:xfrm>
           <a:prstGeom prst="rect">
             <a:avLst/>
           </a:prstGeom>
           <a:noFill/>
+          <a:ln>
+            <a:solidFill>
+              <a:schemeClr val="tx1"/>
+            </a:solidFill>
+          </a:ln>
         </p:spPr>
         <p:txBody>
           <a:bodyPr wrap="square">
@@ -3691,7 +3834,21 @@
                 <a:latin typeface="D2Coding" panose="020B0609020101020101" pitchFamily="49" charset="-127"/>
                 <a:ea typeface="D2Coding" panose="020B0609020101020101" pitchFamily="49" charset="-127"/>
               </a:rPr>
-              <a:t> 대한 업데이트(앞서 설명한 메모리 기법을 사용하여 대화를 쉽게 이어갈 수 있게 해 줌)와 함께, 사용자의 질문에 대해 </a:t>
+              <a:t> 대한 업데이트(앞서 설명한 메모리 기법을 사용하여 대화를 </a:t>
+            </a:r>
+            <a:r>
+              <a:rPr lang="ko-KR" altLang="en-US" sz="1400" dirty="0" err="1">
+                <a:latin typeface="D2Coding" panose="020B0609020101020101" pitchFamily="49" charset="-127"/>
+                <a:ea typeface="D2Coding" panose="020B0609020101020101" pitchFamily="49" charset="-127"/>
+              </a:rPr>
+              <a:t>이어감</a:t>
+            </a:r>
+            <a:r>
+              <a:rPr lang="ko-KR" altLang="en-US" sz="1400" dirty="0">
+                <a:latin typeface="D2Coding" panose="020B0609020101020101" pitchFamily="49" charset="-127"/>
+                <a:ea typeface="D2Coding" panose="020B0609020101020101" pitchFamily="49" charset="-127"/>
+              </a:rPr>
+              <a:t>)와 함께, 사용자의 질문에 대해 </a:t>
             </a:r>
             <a:r>
               <a:rPr lang="ko-KR" altLang="en-US" sz="1400" dirty="0" err="1">
@@ -3779,7 +3936,14 @@
                 <a:latin typeface="D2Coding" panose="020B0609020101020101" pitchFamily="49" charset="-127"/>
                 <a:ea typeface="D2Coding" panose="020B0609020101020101" pitchFamily="49" charset="-127"/>
               </a:rPr>
-              <a:t> 노드: 해당 인덱스에서 관련 문서 집합을 반환했습니다. 이는 앞서 본 그래프 그림에서 </a:t>
+              <a:t> 노드: 해당 인덱스에서 관련 문서 집합을 반환</a:t>
+            </a:r>
+            <a:r>
+              <a:rPr lang="en-US" altLang="ko-KR" sz="1400" dirty="0">
+                <a:latin typeface="D2Coding" panose="020B0609020101020101" pitchFamily="49" charset="-127"/>
+                <a:ea typeface="D2Coding" panose="020B0609020101020101" pitchFamily="49" charset="-127"/>
+              </a:rPr>
+              <a:t>(</a:t>
             </a:r>
             <a:r>
               <a:rPr lang="ko-KR" altLang="en-US" sz="1400" dirty="0" err="1">
@@ -3795,6 +3959,17 @@
               </a:rPr>
               <a:t> 판단에 따라 왼쪽 경로를 택함</a:t>
             </a:r>
+            <a:r>
+              <a:rPr lang="en-US" altLang="ko-KR" sz="1400" dirty="0">
+                <a:latin typeface="D2Coding" panose="020B0609020101020101" pitchFamily="49" charset="-127"/>
+                <a:ea typeface="D2Coding" panose="020B0609020101020101" pitchFamily="49" charset="-127"/>
+              </a:rPr>
+              <a:t>)</a:t>
+            </a:r>
+            <a:endParaRPr lang="ko-KR" altLang="en-US" sz="1400" dirty="0">
+              <a:latin typeface="D2Coding" panose="020B0609020101020101" pitchFamily="49" charset="-127"/>
+              <a:ea typeface="D2Coding" panose="020B0609020101020101" pitchFamily="49" charset="-127"/>
+            </a:endParaRPr>
           </a:p>
           <a:p>
             <a:pPr marL="342900" indent="-342900">
@@ -3867,9 +4042,151 @@
               </a:rPr>
               <a:t> 저장</a:t>
             </a:r>
+            <a:endParaRPr lang="en-US" altLang="ko-KR" sz="1400" dirty="0">
+              <a:latin typeface="D2Coding" panose="020B0609020101020101" pitchFamily="49" charset="-127"/>
+              <a:ea typeface="D2Coding" panose="020B0609020101020101" pitchFamily="49" charset="-127"/>
+            </a:endParaRPr>
+          </a:p>
+          <a:p>
+            <a:pPr marL="342900" indent="-342900">
+              <a:buFont typeface="+mj-lt"/>
+              <a:buAutoNum type="arabicPeriod"/>
+            </a:pPr>
+            <a:endParaRPr lang="ko-KR" altLang="en-US" sz="1400" dirty="0">
+              <a:latin typeface="D2Coding" panose="020B0609020101020101" pitchFamily="49" charset="-127"/>
+              <a:ea typeface="D2Coding" panose="020B0609020101020101" pitchFamily="49" charset="-127"/>
+            </a:endParaRPr>
           </a:p>
         </p:txBody>
       </p:sp>
+      <p:sp>
+        <p:nvSpPr>
+          <p:cNvPr id="6" name="TextBox 5">
+            <a:extLst>
+              <a:ext uri="{FF2B5EF4-FFF2-40B4-BE49-F238E27FC236}">
+                <a16:creationId xmlns:a16="http://schemas.microsoft.com/office/drawing/2014/main" id="{7B23FC95-BF9B-0825-6C6A-DCEE209D20F9}"/>
+              </a:ext>
+            </a:extLst>
+          </p:cNvPr>
+          <p:cNvSpPr txBox="1"/>
+          <p:nvPr/>
+        </p:nvSpPr>
+        <p:spPr>
+          <a:xfrm>
+            <a:off x="585785" y="2244984"/>
+            <a:ext cx="5205180" cy="338554"/>
+          </a:xfrm>
+          <a:prstGeom prst="rect">
+            <a:avLst/>
+          </a:prstGeom>
+          <a:solidFill>
+            <a:schemeClr val="tx1"/>
+          </a:solidFill>
+        </p:spPr>
+        <p:txBody>
+          <a:bodyPr wrap="square">
+            <a:spAutoFit/>
+          </a:bodyPr>
+          <a:lstStyle/>
+          <a:p>
+            <a:r>
+              <a:rPr lang="ko-KR" altLang="en-US" sz="1600" dirty="0" err="1">
+                <a:solidFill>
+                  <a:schemeClr val="bg1"/>
+                </a:solidFill>
+                <a:latin typeface="D2Coding" panose="020B0609020101020101" pitchFamily="49" charset="-127"/>
+                <a:ea typeface="D2Coding" panose="020B0609020101020101" pitchFamily="49" charset="-127"/>
+              </a:rPr>
+              <a:t>Router</a:t>
+            </a:r>
+            <a:r>
+              <a:rPr lang="ko-KR" altLang="en-US" sz="1600" dirty="0">
+                <a:solidFill>
+                  <a:schemeClr val="bg1"/>
+                </a:solidFill>
+                <a:latin typeface="D2Coding" panose="020B0609020101020101" pitchFamily="49" charset="-127"/>
+                <a:ea typeface="D2Coding" panose="020B0609020101020101" pitchFamily="49" charset="-127"/>
+              </a:rPr>
+              <a:t> </a:t>
+            </a:r>
+            <a:r>
+              <a:rPr lang="en-US" altLang="ko-KR" sz="1600" dirty="0">
+                <a:solidFill>
+                  <a:schemeClr val="bg1"/>
+                </a:solidFill>
+                <a:latin typeface="D2Coding" panose="020B0609020101020101" pitchFamily="49" charset="-127"/>
+                <a:ea typeface="D2Coding" panose="020B0609020101020101" pitchFamily="49" charset="-127"/>
+              </a:rPr>
+              <a:t>:</a:t>
+            </a:r>
+            <a:r>
+              <a:rPr lang="ko-KR" altLang="en-US" sz="1600" dirty="0">
+                <a:solidFill>
+                  <a:schemeClr val="bg1"/>
+                </a:solidFill>
+                <a:latin typeface="D2Coding" panose="020B0609020101020101" pitchFamily="49" charset="-127"/>
+                <a:ea typeface="D2Coding" panose="020B0609020101020101" pitchFamily="49" charset="-127"/>
+              </a:rPr>
+              <a:t> </a:t>
+            </a:r>
+            <a:r>
+              <a:rPr lang="ko-KR" altLang="en-US" sz="1600" dirty="0" err="1">
+                <a:solidFill>
+                  <a:schemeClr val="bg1"/>
+                </a:solidFill>
+                <a:latin typeface="D2Coding" panose="020B0609020101020101" pitchFamily="49" charset="-127"/>
+                <a:ea typeface="D2Coding" panose="020B0609020101020101" pitchFamily="49" charset="-127"/>
+              </a:rPr>
+              <a:t>LLM이</a:t>
+            </a:r>
+            <a:r>
+              <a:rPr lang="ko-KR" altLang="en-US" sz="1600" dirty="0">
+                <a:solidFill>
+                  <a:schemeClr val="bg1"/>
+                </a:solidFill>
+                <a:latin typeface="D2Coding" panose="020B0609020101020101" pitchFamily="49" charset="-127"/>
+                <a:ea typeface="D2Coding" panose="020B0609020101020101" pitchFamily="49" charset="-127"/>
+              </a:rPr>
+              <a:t> 경로를 정하고, 그에 따라 분기</a:t>
+            </a:r>
+          </a:p>
+        </p:txBody>
+      </p:sp>
+      <p:pic>
+        <p:nvPicPr>
+          <p:cNvPr id="5" name="그림 4">
+            <a:extLst>
+              <a:ext uri="{FF2B5EF4-FFF2-40B4-BE49-F238E27FC236}">
+                <a16:creationId xmlns:a16="http://schemas.microsoft.com/office/drawing/2014/main" id="{06600A6C-F86E-80A7-23F4-6A9706647904}"/>
+              </a:ext>
+            </a:extLst>
+          </p:cNvPr>
+          <p:cNvPicPr>
+            <a:picLocks noChangeAspect="1"/>
+          </p:cNvPicPr>
+          <p:nvPr/>
+        </p:nvPicPr>
+        <p:blipFill>
+          <a:blip r:embed="rId2"/>
+          <a:stretch>
+            <a:fillRect/>
+          </a:stretch>
+        </p:blipFill>
+        <p:spPr>
+          <a:xfrm>
+            <a:off x="5790965" y="2264034"/>
+            <a:ext cx="6148267" cy="3861138"/>
+          </a:xfrm>
+          <a:prstGeom prst="rect">
+            <a:avLst/>
+          </a:prstGeom>
+          <a:ln>
+            <a:solidFill>
+              <a:schemeClr val="tx1"/>
+            </a:solidFill>
+          </a:ln>
+        </p:spPr>
+      </p:pic>
     </p:spTree>
     <p:extLst>
       <p:ext uri="{BB962C8B-B14F-4D97-AF65-F5344CB8AC3E}">
@@ -4001,7 +4318,7 @@
                 <a:ea typeface="D2Coding" panose="020B0609020101020101" pitchFamily="49" charset="-127"/>
                 <a:cs typeface="Segoe UI Light" panose="020B0502040204020203" pitchFamily="34" charset="0"/>
               </a:rPr>
-              <a:t>Goals</a:t>
+              <a:t>Content</a:t>
             </a:r>
             <a:endParaRPr lang="ko-KR" altLang="en-US" sz="2800" cap="none" dirty="0">
               <a:solidFill>
@@ -4016,36 +4333,446 @@
           </a:p>
         </p:txBody>
       </p:sp>
-      <p:pic>
-        <p:nvPicPr>
-          <p:cNvPr id="10" name="그림 9">
+      <p:sp>
+        <p:nvSpPr>
+          <p:cNvPr id="2" name="Rectangle 1">
             <a:extLst>
               <a:ext uri="{FF2B5EF4-FFF2-40B4-BE49-F238E27FC236}">
-                <a16:creationId xmlns:a16="http://schemas.microsoft.com/office/drawing/2014/main" id="{89FFED5F-779B-3183-F3B2-C27B58979D3E}"/>
+                <a16:creationId xmlns:a16="http://schemas.microsoft.com/office/drawing/2014/main" id="{0B52FDCF-F1C1-47AA-CB84-900C5A46CB36}"/>
               </a:ext>
             </a:extLst>
           </p:cNvPr>
-          <p:cNvPicPr>
-            <a:picLocks noChangeAspect="1"/>
-          </p:cNvPicPr>
+          <p:cNvSpPr>
+            <a:spLocks noChangeArrowheads="1"/>
+          </p:cNvSpPr>
           <p:nvPr/>
-        </p:nvPicPr>
-        <p:blipFill>
-          <a:blip r:embed="rId2"/>
-          <a:stretch>
-            <a:fillRect/>
-          </a:stretch>
-        </p:blipFill>
-        <p:spPr>
+        </p:nvSpPr>
+        <p:spPr bwMode="auto">
           <a:xfrm>
-            <a:off x="2278049" y="2659313"/>
-            <a:ext cx="7635902" cy="1539373"/>
+            <a:off x="1590675" y="1940675"/>
+            <a:ext cx="8401050" cy="2976649"/>
           </a:xfrm>
           <a:prstGeom prst="rect">
             <a:avLst/>
           </a:prstGeom>
+          <a:noFill/>
+          <a:ln>
+            <a:noFill/>
+          </a:ln>
+          <a:effectLst/>
+          <a:extLst>
+            <a:ext uri="{909E8E84-426E-40DD-AFC4-6F175D3DCCD1}">
+              <a14:hiddenFill xmlns:a14="http://schemas.microsoft.com/office/drawing/2010/main">
+                <a:solidFill>
+                  <a:schemeClr val="accent1"/>
+                </a:solidFill>
+              </a14:hiddenFill>
+            </a:ext>
+            <a:ext uri="{91240B29-F687-4F45-9708-019B960494DF}">
+              <a14:hiddenLine xmlns:a14="http://schemas.microsoft.com/office/drawing/2010/main" w="9525">
+                <a:solidFill>
+                  <a:schemeClr val="tx1"/>
+                </a:solidFill>
+                <a:miter lim="800000"/>
+                <a:headEnd/>
+                <a:tailEnd/>
+              </a14:hiddenLine>
+            </a:ext>
+            <a:ext uri="{AF507438-7753-43E0-B8FC-AC1667EBCBE1}">
+              <a14:hiddenEffects xmlns:a14="http://schemas.microsoft.com/office/drawing/2010/main">
+                <a:effectLst>
+                  <a:outerShdw dist="35921" dir="2700000" algn="ctr" rotWithShape="0">
+                    <a:schemeClr val="bg2"/>
+                  </a:outerShdw>
+                </a:effectLst>
+              </a14:hiddenEffects>
+            </a:ext>
+          </a:extLst>
         </p:spPr>
-      </p:pic>
+        <p:txBody>
+          <a:bodyPr vert="horz" wrap="square" lIns="0" tIns="0" rIns="0" bIns="45720" numCol="1" anchor="ctr" anchorCtr="0" compatLnSpc="1">
+            <a:prstTxWarp prst="textNoShape">
+              <a:avLst/>
+            </a:prstTxWarp>
+            <a:spAutoFit/>
+          </a:bodyPr>
+          <a:lstStyle/>
+          <a:p>
+            <a:pPr marL="0" marR="0" lvl="0" indent="0" algn="l" defTabSz="914400" rtl="0" eaLnBrk="0" fontAlgn="base" latinLnBrk="0" hangingPunct="0">
+              <a:lnSpc>
+                <a:spcPct val="150000"/>
+              </a:lnSpc>
+              <a:spcBef>
+                <a:spcPct val="0"/>
+              </a:spcBef>
+              <a:spcAft>
+                <a:spcPct val="0"/>
+              </a:spcAft>
+              <a:buClrTx/>
+              <a:buSzTx/>
+              <a:buFontTx/>
+              <a:buNone/>
+              <a:tabLst/>
+            </a:pPr>
+            <a:r>
+              <a:rPr kumimoji="0" lang="ko-KR" altLang="ko-KR" sz="2400" b="1" i="0" u="none" strike="noStrike" cap="none" normalizeH="0" baseline="0" dirty="0" err="1">
+                <a:ln>
+                  <a:noFill/>
+                </a:ln>
+                <a:solidFill>
+                  <a:schemeClr val="tx1"/>
+                </a:solidFill>
+                <a:effectLst/>
+                <a:latin typeface="D2Coding" panose="020B0609020101020101" pitchFamily="49" charset="-127"/>
+                <a:ea typeface="D2Coding" panose="020B0609020101020101" pitchFamily="49" charset="-127"/>
+              </a:rPr>
+              <a:t>Cognitive</a:t>
+            </a:r>
+            <a:r>
+              <a:rPr kumimoji="0" lang="ko-KR" altLang="ko-KR" sz="2400" b="1" i="0" u="none" strike="noStrike" cap="none" normalizeH="0" baseline="0" dirty="0">
+                <a:ln>
+                  <a:noFill/>
+                </a:ln>
+                <a:solidFill>
+                  <a:schemeClr val="tx1"/>
+                </a:solidFill>
+                <a:effectLst/>
+                <a:latin typeface="D2Coding" panose="020B0609020101020101" pitchFamily="49" charset="-127"/>
+                <a:ea typeface="D2Coding" panose="020B0609020101020101" pitchFamily="49" charset="-127"/>
+              </a:rPr>
+              <a:t> </a:t>
+            </a:r>
+            <a:r>
+              <a:rPr kumimoji="0" lang="ko-KR" altLang="ko-KR" sz="2400" b="1" i="0" u="none" strike="noStrike" cap="none" normalizeH="0" baseline="0" dirty="0" err="1">
+                <a:ln>
+                  <a:noFill/>
+                </a:ln>
+                <a:solidFill>
+                  <a:schemeClr val="tx1"/>
+                </a:solidFill>
+                <a:effectLst/>
+                <a:latin typeface="D2Coding" panose="020B0609020101020101" pitchFamily="49" charset="-127"/>
+                <a:ea typeface="D2Coding" panose="020B0609020101020101" pitchFamily="49" charset="-127"/>
+              </a:rPr>
+              <a:t>Architectures</a:t>
+            </a:r>
+            <a:r>
+              <a:rPr kumimoji="0" lang="ko-KR" altLang="ko-KR" sz="2400" b="1" i="0" u="none" strike="noStrike" cap="none" normalizeH="0" baseline="0" dirty="0">
+                <a:ln>
+                  <a:noFill/>
+                </a:ln>
+                <a:solidFill>
+                  <a:schemeClr val="tx1"/>
+                </a:solidFill>
+                <a:effectLst/>
+                <a:latin typeface="D2Coding" panose="020B0609020101020101" pitchFamily="49" charset="-127"/>
+                <a:ea typeface="D2Coding" panose="020B0609020101020101" pitchFamily="49" charset="-127"/>
+              </a:rPr>
+              <a:t> </a:t>
+            </a:r>
+            <a:r>
+              <a:rPr kumimoji="0" lang="ko-KR" altLang="ko-KR" sz="2400" b="1" i="0" u="none" strike="noStrike" cap="none" normalizeH="0" baseline="0" dirty="0" err="1">
+                <a:ln>
+                  <a:noFill/>
+                </a:ln>
+                <a:solidFill>
+                  <a:schemeClr val="tx1"/>
+                </a:solidFill>
+                <a:effectLst/>
+                <a:latin typeface="D2Coding" panose="020B0609020101020101" pitchFamily="49" charset="-127"/>
+                <a:ea typeface="D2Coding" panose="020B0609020101020101" pitchFamily="49" charset="-127"/>
+              </a:rPr>
+              <a:t>with</a:t>
+            </a:r>
+            <a:r>
+              <a:rPr kumimoji="0" lang="ko-KR" altLang="ko-KR" sz="2400" b="1" i="0" u="none" strike="noStrike" cap="none" normalizeH="0" baseline="0" dirty="0">
+                <a:ln>
+                  <a:noFill/>
+                </a:ln>
+                <a:solidFill>
+                  <a:schemeClr val="tx1"/>
+                </a:solidFill>
+                <a:effectLst/>
+                <a:latin typeface="D2Coding" panose="020B0609020101020101" pitchFamily="49" charset="-127"/>
+                <a:ea typeface="D2Coding" panose="020B0609020101020101" pitchFamily="49" charset="-127"/>
+              </a:rPr>
+              <a:t> </a:t>
+            </a:r>
+            <a:r>
+              <a:rPr kumimoji="0" lang="ko-KR" altLang="ko-KR" sz="2400" b="1" i="0" u="none" strike="noStrike" cap="none" normalizeH="0" baseline="0" dirty="0" err="1">
+                <a:ln>
+                  <a:noFill/>
+                </a:ln>
+                <a:solidFill>
+                  <a:schemeClr val="tx1"/>
+                </a:solidFill>
+                <a:effectLst/>
+                <a:latin typeface="D2Coding" panose="020B0609020101020101" pitchFamily="49" charset="-127"/>
+                <a:ea typeface="D2Coding" panose="020B0609020101020101" pitchFamily="49" charset="-127"/>
+              </a:rPr>
+              <a:t>LangGraph</a:t>
+            </a:r>
+            <a:endParaRPr kumimoji="0" lang="ko-KR" altLang="ko-KR" sz="2400" b="0" i="0" u="none" strike="noStrike" cap="none" normalizeH="0" baseline="0" dirty="0">
+              <a:ln>
+                <a:noFill/>
+              </a:ln>
+              <a:solidFill>
+                <a:schemeClr val="tx1"/>
+              </a:solidFill>
+              <a:effectLst/>
+              <a:latin typeface="D2Coding" panose="020B0609020101020101" pitchFamily="49" charset="-127"/>
+              <a:ea typeface="D2Coding" panose="020B0609020101020101" pitchFamily="49" charset="-127"/>
+            </a:endParaRPr>
+          </a:p>
+          <a:p>
+            <a:pPr marL="800100" lvl="1" indent="-342900" eaLnBrk="0" fontAlgn="base" hangingPunct="0">
+              <a:lnSpc>
+                <a:spcPct val="200000"/>
+              </a:lnSpc>
+              <a:spcBef>
+                <a:spcPct val="0"/>
+              </a:spcBef>
+              <a:spcAft>
+                <a:spcPct val="0"/>
+              </a:spcAft>
+              <a:buFont typeface="Wingdings" panose="05000000000000000000" pitchFamily="2" charset="2"/>
+              <a:buChar char="§"/>
+            </a:pPr>
+            <a:r>
+              <a:rPr kumimoji="0" lang="ko-KR" altLang="ko-KR" sz="2000" b="0" i="0" u="none" strike="noStrike" cap="none" normalizeH="0" baseline="0" dirty="0" err="1">
+                <a:ln>
+                  <a:noFill/>
+                </a:ln>
+                <a:solidFill>
+                  <a:schemeClr val="tx1"/>
+                </a:solidFill>
+                <a:effectLst/>
+                <a:latin typeface="D2Coding" panose="020B0609020101020101" pitchFamily="49" charset="-127"/>
+                <a:ea typeface="D2Coding" panose="020B0609020101020101" pitchFamily="49" charset="-127"/>
+              </a:rPr>
+              <a:t>Architecture</a:t>
+            </a:r>
+            <a:r>
+              <a:rPr kumimoji="0" lang="ko-KR" altLang="ko-KR" sz="2000" b="0" i="0" u="none" strike="noStrike" cap="none" normalizeH="0" baseline="0" dirty="0">
+                <a:ln>
+                  <a:noFill/>
+                </a:ln>
+                <a:solidFill>
+                  <a:schemeClr val="tx1"/>
+                </a:solidFill>
+                <a:effectLst/>
+                <a:latin typeface="D2Coding" panose="020B0609020101020101" pitchFamily="49" charset="-127"/>
+                <a:ea typeface="D2Coding" panose="020B0609020101020101" pitchFamily="49" charset="-127"/>
+              </a:rPr>
+              <a:t> #1: LLM </a:t>
+            </a:r>
+            <a:r>
+              <a:rPr kumimoji="0" lang="ko-KR" altLang="ko-KR" sz="2000" b="0" i="0" u="none" strike="noStrike" cap="none" normalizeH="0" baseline="0" dirty="0" err="1">
+                <a:ln>
+                  <a:noFill/>
+                </a:ln>
+                <a:solidFill>
+                  <a:schemeClr val="tx1"/>
+                </a:solidFill>
+                <a:effectLst/>
+                <a:latin typeface="D2Coding" panose="020B0609020101020101" pitchFamily="49" charset="-127"/>
+                <a:ea typeface="D2Coding" panose="020B0609020101020101" pitchFamily="49" charset="-127"/>
+              </a:rPr>
+              <a:t>Call</a:t>
+            </a:r>
+            <a:endParaRPr kumimoji="0" lang="ko-KR" altLang="ko-KR" sz="2000" b="0" i="0" u="none" strike="noStrike" cap="none" normalizeH="0" baseline="0" dirty="0">
+              <a:ln>
+                <a:noFill/>
+              </a:ln>
+              <a:solidFill>
+                <a:schemeClr val="tx1"/>
+              </a:solidFill>
+              <a:effectLst/>
+              <a:latin typeface="D2Coding" panose="020B0609020101020101" pitchFamily="49" charset="-127"/>
+              <a:ea typeface="D2Coding" panose="020B0609020101020101" pitchFamily="49" charset="-127"/>
+            </a:endParaRPr>
+          </a:p>
+          <a:p>
+            <a:pPr marL="800100" lvl="1" indent="-342900" eaLnBrk="0" fontAlgn="base" hangingPunct="0">
+              <a:lnSpc>
+                <a:spcPct val="200000"/>
+              </a:lnSpc>
+              <a:spcBef>
+                <a:spcPct val="0"/>
+              </a:spcBef>
+              <a:spcAft>
+                <a:spcPct val="0"/>
+              </a:spcAft>
+              <a:buFont typeface="Wingdings" panose="05000000000000000000" pitchFamily="2" charset="2"/>
+              <a:buChar char="§"/>
+            </a:pPr>
+            <a:r>
+              <a:rPr kumimoji="0" lang="ko-KR" altLang="ko-KR" sz="2000" b="0" i="0" u="none" strike="noStrike" cap="none" normalizeH="0" baseline="0" dirty="0" err="1">
+                <a:ln>
+                  <a:noFill/>
+                </a:ln>
+                <a:solidFill>
+                  <a:schemeClr val="tx1"/>
+                </a:solidFill>
+                <a:effectLst/>
+                <a:latin typeface="D2Coding" panose="020B0609020101020101" pitchFamily="49" charset="-127"/>
+                <a:ea typeface="D2Coding" panose="020B0609020101020101" pitchFamily="49" charset="-127"/>
+              </a:rPr>
+              <a:t>Architecture</a:t>
+            </a:r>
+            <a:r>
+              <a:rPr kumimoji="0" lang="ko-KR" altLang="ko-KR" sz="2000" b="0" i="0" u="none" strike="noStrike" cap="none" normalizeH="0" baseline="0" dirty="0">
+                <a:ln>
+                  <a:noFill/>
+                </a:ln>
+                <a:solidFill>
+                  <a:schemeClr val="tx1"/>
+                </a:solidFill>
+                <a:effectLst/>
+                <a:latin typeface="D2Coding" panose="020B0609020101020101" pitchFamily="49" charset="-127"/>
+                <a:ea typeface="D2Coding" panose="020B0609020101020101" pitchFamily="49" charset="-127"/>
+              </a:rPr>
+              <a:t> #2: </a:t>
+            </a:r>
+            <a:r>
+              <a:rPr kumimoji="0" lang="ko-KR" altLang="ko-KR" sz="2000" b="0" i="0" u="none" strike="noStrike" cap="none" normalizeH="0" baseline="0" dirty="0" err="1">
+                <a:ln>
+                  <a:noFill/>
+                </a:ln>
+                <a:solidFill>
+                  <a:schemeClr val="tx1"/>
+                </a:solidFill>
+                <a:effectLst/>
+                <a:latin typeface="D2Coding" panose="020B0609020101020101" pitchFamily="49" charset="-127"/>
+                <a:ea typeface="D2Coding" panose="020B0609020101020101" pitchFamily="49" charset="-127"/>
+              </a:rPr>
+              <a:t>Chain</a:t>
+            </a:r>
+            <a:r>
+              <a:rPr kumimoji="0" lang="ko-KR" altLang="ko-KR" sz="2000" b="0" i="0" u="none" strike="noStrike" cap="none" normalizeH="0" baseline="0" dirty="0">
+                <a:ln>
+                  <a:noFill/>
+                </a:ln>
+                <a:solidFill>
+                  <a:schemeClr val="tx1"/>
+                </a:solidFill>
+                <a:effectLst/>
+                <a:latin typeface="D2Coding" panose="020B0609020101020101" pitchFamily="49" charset="-127"/>
+                <a:ea typeface="D2Coding" panose="020B0609020101020101" pitchFamily="49" charset="-127"/>
+              </a:rPr>
+              <a:t> </a:t>
+            </a:r>
+          </a:p>
+          <a:p>
+            <a:pPr marL="800100" lvl="1" indent="-342900" eaLnBrk="0" fontAlgn="base" hangingPunct="0">
+              <a:lnSpc>
+                <a:spcPct val="200000"/>
+              </a:lnSpc>
+              <a:spcBef>
+                <a:spcPct val="0"/>
+              </a:spcBef>
+              <a:spcAft>
+                <a:spcPct val="0"/>
+              </a:spcAft>
+              <a:buFont typeface="Wingdings" panose="05000000000000000000" pitchFamily="2" charset="2"/>
+              <a:buChar char="§"/>
+            </a:pPr>
+            <a:r>
+              <a:rPr kumimoji="0" lang="ko-KR" altLang="ko-KR" sz="2000" b="0" i="0" u="none" strike="noStrike" cap="none" normalizeH="0" baseline="0" dirty="0" err="1">
+                <a:ln>
+                  <a:noFill/>
+                </a:ln>
+                <a:solidFill>
+                  <a:schemeClr val="tx1"/>
+                </a:solidFill>
+                <a:effectLst/>
+                <a:latin typeface="D2Coding" panose="020B0609020101020101" pitchFamily="49" charset="-127"/>
+                <a:ea typeface="D2Coding" panose="020B0609020101020101" pitchFamily="49" charset="-127"/>
+              </a:rPr>
+              <a:t>Architecture</a:t>
+            </a:r>
+            <a:r>
+              <a:rPr kumimoji="0" lang="ko-KR" altLang="ko-KR" sz="2000" b="0" i="0" u="none" strike="noStrike" cap="none" normalizeH="0" baseline="0" dirty="0">
+                <a:ln>
+                  <a:noFill/>
+                </a:ln>
+                <a:solidFill>
+                  <a:schemeClr val="tx1"/>
+                </a:solidFill>
+                <a:effectLst/>
+                <a:latin typeface="D2Coding" panose="020B0609020101020101" pitchFamily="49" charset="-127"/>
+                <a:ea typeface="D2Coding" panose="020B0609020101020101" pitchFamily="49" charset="-127"/>
+              </a:rPr>
+              <a:t> #3: </a:t>
+            </a:r>
+            <a:r>
+              <a:rPr kumimoji="0" lang="ko-KR" altLang="ko-KR" sz="2000" b="0" i="0" u="none" strike="noStrike" cap="none" normalizeH="0" baseline="0" dirty="0" err="1">
+                <a:ln>
+                  <a:noFill/>
+                </a:ln>
+                <a:solidFill>
+                  <a:schemeClr val="tx1"/>
+                </a:solidFill>
+                <a:effectLst/>
+                <a:latin typeface="D2Coding" panose="020B0609020101020101" pitchFamily="49" charset="-127"/>
+                <a:ea typeface="D2Coding" panose="020B0609020101020101" pitchFamily="49" charset="-127"/>
+              </a:rPr>
+              <a:t>Router</a:t>
+            </a:r>
+            <a:endParaRPr kumimoji="0" lang="ko-KR" altLang="ko-KR" sz="2000" b="0" i="0" u="none" strike="noStrike" cap="none" normalizeH="0" baseline="0" dirty="0">
+              <a:ln>
+                <a:noFill/>
+              </a:ln>
+              <a:solidFill>
+                <a:schemeClr val="tx1"/>
+              </a:solidFill>
+              <a:effectLst/>
+              <a:latin typeface="D2Coding" panose="020B0609020101020101" pitchFamily="49" charset="-127"/>
+              <a:ea typeface="D2Coding" panose="020B0609020101020101" pitchFamily="49" charset="-127"/>
+            </a:endParaRPr>
+          </a:p>
+          <a:p>
+            <a:pPr marL="800100" lvl="1" indent="-342900" eaLnBrk="0" fontAlgn="base" hangingPunct="0">
+              <a:lnSpc>
+                <a:spcPct val="200000"/>
+              </a:lnSpc>
+              <a:spcBef>
+                <a:spcPct val="0"/>
+              </a:spcBef>
+              <a:spcAft>
+                <a:spcPct val="0"/>
+              </a:spcAft>
+              <a:buFont typeface="Wingdings" panose="05000000000000000000" pitchFamily="2" charset="2"/>
+              <a:buChar char="§"/>
+            </a:pPr>
+            <a:r>
+              <a:rPr kumimoji="0" lang="ko-KR" altLang="ko-KR" sz="2000" b="0" i="0" u="none" strike="noStrike" cap="none" normalizeH="0" baseline="0" dirty="0" err="1">
+                <a:ln>
+                  <a:noFill/>
+                </a:ln>
+                <a:solidFill>
+                  <a:schemeClr val="tx1"/>
+                </a:solidFill>
+                <a:effectLst/>
+                <a:latin typeface="D2Coding" panose="020B0609020101020101" pitchFamily="49" charset="-127"/>
+                <a:ea typeface="D2Coding" panose="020B0609020101020101" pitchFamily="49" charset="-127"/>
+              </a:rPr>
+              <a:t>Summary</a:t>
+            </a:r>
+            <a:endParaRPr kumimoji="0" lang="ko-KR" altLang="ko-KR" sz="2000" b="0" i="0" u="none" strike="noStrike" cap="none" normalizeH="0" baseline="0" dirty="0">
+              <a:ln>
+                <a:noFill/>
+              </a:ln>
+              <a:solidFill>
+                <a:schemeClr val="tx1"/>
+              </a:solidFill>
+              <a:effectLst/>
+              <a:latin typeface="D2Coding" panose="020B0609020101020101" pitchFamily="49" charset="-127"/>
+              <a:ea typeface="D2Coding" panose="020B0609020101020101" pitchFamily="49" charset="-127"/>
+            </a:endParaRPr>
+          </a:p>
+        </p:txBody>
+      </p:sp>
     </p:spTree>
     <p:extLst>
       <p:ext uri="{BB962C8B-B14F-4D97-AF65-F5344CB8AC3E}">
@@ -4534,6 +5261,11 @@
             <a:avLst/>
           </a:prstGeom>
           <a:noFill/>
+          <a:ln>
+            <a:solidFill>
+              <a:schemeClr val="tx1"/>
+            </a:solidFill>
+          </a:ln>
         </p:spPr>
         <p:txBody>
           <a:bodyPr wrap="square">
@@ -4880,7 +5612,7 @@
                 <a:latin typeface="D2Coding" panose="020B0609020101020101" pitchFamily="49" charset="-127"/>
                 <a:ea typeface="D2Coding" panose="020B0609020101020101" pitchFamily="49" charset="-127"/>
               </a:rPr>
-              <a:t>에 의해 결정되는지 결정하는 것</a:t>
+              <a:t>에 의해 결정되는 정도</a:t>
             </a:r>
             <a:endParaRPr lang="en-US" altLang="ko-KR" sz="1600" dirty="0">
               <a:latin typeface="D2Coding" panose="020B0609020101020101" pitchFamily="49" charset="-127"/>
@@ -6139,8 +6871,8 @@
         </p:blipFill>
         <p:spPr>
           <a:xfrm>
-            <a:off x="4425049" y="2550113"/>
-            <a:ext cx="6142252" cy="4008467"/>
+            <a:off x="576262" y="2831285"/>
+            <a:ext cx="4315613" cy="2816393"/>
           </a:xfrm>
           <a:prstGeom prst="rect">
             <a:avLst/>
@@ -6154,10 +6886,10 @@
       </p:pic>
       <p:sp>
         <p:nvSpPr>
-          <p:cNvPr id="10" name="TextBox 9">
+          <p:cNvPr id="5" name="TextBox 4">
             <a:extLst>
               <a:ext uri="{FF2B5EF4-FFF2-40B4-BE49-F238E27FC236}">
-                <a16:creationId xmlns:a16="http://schemas.microsoft.com/office/drawing/2014/main" id="{E0EA883E-4BED-0F41-0C0A-D7BA7CA1EAA7}"/>
+                <a16:creationId xmlns:a16="http://schemas.microsoft.com/office/drawing/2014/main" id="{D68D0EF1-1A9F-C1DE-041F-708F77812A4B}"/>
               </a:ext>
             </a:extLst>
           </p:cNvPr>
@@ -6166,8 +6898,8 @@
         </p:nvSpPr>
         <p:spPr>
           <a:xfrm>
-            <a:off x="1610069" y="2531063"/>
-            <a:ext cx="2814980" cy="584775"/>
+            <a:off x="4976812" y="2796570"/>
+            <a:ext cx="6934200" cy="2279983"/>
           </a:xfrm>
           <a:prstGeom prst="rect">
             <a:avLst/>
@@ -6182,140 +6914,466 @@
           </a:bodyPr>
           <a:lstStyle/>
           <a:p>
-            <a:pPr algn="ctr"/>
-            <a:r>
-              <a:rPr lang="en-US" altLang="ko-KR" sz="1600" cap="none" dirty="0">
+            <a:pPr>
+              <a:lnSpc>
+                <a:spcPct val="150000"/>
+              </a:lnSpc>
+            </a:pPr>
+            <a:r>
+              <a:rPr lang="en-US" altLang="ko-KR" sz="1200" dirty="0">
                 <a:solidFill>
                   <a:schemeClr val="bg1"/>
                 </a:solidFill>
                 <a:latin typeface="D2Coding" panose="020B0609020101020101" pitchFamily="49" charset="-127"/>
                 <a:ea typeface="D2Coding" panose="020B0609020101020101" pitchFamily="49" charset="-127"/>
-                <a:cs typeface="Segoe UI Light" panose="020B0502040204020203" pitchFamily="34" charset="0"/>
-              </a:rPr>
-              <a:t>AI Agent Architecture</a:t>
-            </a:r>
-          </a:p>
-          <a:p>
-            <a:pPr algn="ctr"/>
-            <a:r>
-              <a:rPr lang="en-US" altLang="ko-KR" sz="1600" dirty="0">
+              </a:rPr>
+              <a:t>[ Agent (</a:t>
+            </a:r>
+            <a:r>
+              <a:rPr lang="ko-KR" altLang="en-US" sz="1200" dirty="0">
                 <a:solidFill>
                   <a:schemeClr val="bg1"/>
                 </a:solidFill>
                 <a:latin typeface="D2Coding" panose="020B0609020101020101" pitchFamily="49" charset="-127"/>
                 <a:ea typeface="D2Coding" panose="020B0609020101020101" pitchFamily="49" charset="-127"/>
-                <a:cs typeface="Segoe UI Light" panose="020B0502040204020203" pitchFamily="34" charset="0"/>
-              </a:rPr>
-              <a:t>(AI RAG)</a:t>
-            </a:r>
-            <a:endParaRPr lang="ko-KR" altLang="en-US" sz="1600" dirty="0">
+              </a:rPr>
+              <a:t>주체</a:t>
+            </a:r>
+            <a:r>
+              <a:rPr lang="en-US" altLang="ko-KR" sz="1200" dirty="0">
+                <a:solidFill>
+                  <a:schemeClr val="bg1"/>
+                </a:solidFill>
+                <a:latin typeface="D2Coding" panose="020B0609020101020101" pitchFamily="49" charset="-127"/>
+                <a:ea typeface="D2Coding" panose="020B0609020101020101" pitchFamily="49" charset="-127"/>
+              </a:rPr>
+              <a:t>/</a:t>
+            </a:r>
+            <a:r>
+              <a:rPr lang="ko-KR" altLang="en-US" sz="1200" dirty="0" err="1">
+                <a:solidFill>
+                  <a:schemeClr val="bg1"/>
+                </a:solidFill>
+                <a:latin typeface="D2Coding" panose="020B0609020101020101" pitchFamily="49" charset="-127"/>
+                <a:ea typeface="D2Coding" panose="020B0609020101020101" pitchFamily="49" charset="-127"/>
+              </a:rPr>
+              <a:t>조율자</a:t>
+            </a:r>
+            <a:r>
+              <a:rPr lang="en-US" altLang="ko-KR" sz="1200" dirty="0">
+                <a:solidFill>
+                  <a:schemeClr val="bg1"/>
+                </a:solidFill>
+                <a:latin typeface="D2Coding" panose="020B0609020101020101" pitchFamily="49" charset="-127"/>
+                <a:ea typeface="D2Coding" panose="020B0609020101020101" pitchFamily="49" charset="-127"/>
+              </a:rPr>
+              <a:t>) ] </a:t>
+            </a:r>
+          </a:p>
+          <a:p>
+            <a:pPr>
+              <a:lnSpc>
+                <a:spcPct val="150000"/>
+              </a:lnSpc>
+            </a:pPr>
+            <a:r>
+              <a:rPr lang="en-US" altLang="ko-KR" sz="1200" dirty="0">
+                <a:solidFill>
+                  <a:schemeClr val="bg1"/>
+                </a:solidFill>
+                <a:latin typeface="D2Coding" panose="020B0609020101020101" pitchFamily="49" charset="-127"/>
+                <a:ea typeface="D2Coding" panose="020B0609020101020101" pitchFamily="49" charset="-127"/>
+              </a:rPr>
+              <a:t>      ├── [ MCP (</a:t>
+            </a:r>
+            <a:r>
+              <a:rPr lang="ko-KR" altLang="en-US" sz="1200" dirty="0">
+                <a:solidFill>
+                  <a:schemeClr val="bg1"/>
+                </a:solidFill>
+                <a:latin typeface="D2Coding" panose="020B0609020101020101" pitchFamily="49" charset="-127"/>
+                <a:ea typeface="D2Coding" panose="020B0609020101020101" pitchFamily="49" charset="-127"/>
+              </a:rPr>
+              <a:t>연결 표준 규격</a:t>
+            </a:r>
+            <a:r>
+              <a:rPr lang="en-US" altLang="ko-KR" sz="1200" dirty="0">
+                <a:solidFill>
+                  <a:schemeClr val="bg1"/>
+                </a:solidFill>
+                <a:latin typeface="D2Coding" panose="020B0609020101020101" pitchFamily="49" charset="-127"/>
+                <a:ea typeface="D2Coding" panose="020B0609020101020101" pitchFamily="49" charset="-127"/>
+              </a:rPr>
+              <a:t>) ] ── (</a:t>
+            </a:r>
+            <a:r>
+              <a:rPr lang="ko-KR" altLang="en-US" sz="1200" dirty="0">
+                <a:solidFill>
+                  <a:schemeClr val="bg1"/>
+                </a:solidFill>
+                <a:latin typeface="D2Coding" panose="020B0609020101020101" pitchFamily="49" charset="-127"/>
+                <a:ea typeface="D2Coding" panose="020B0609020101020101" pitchFamily="49" charset="-127"/>
+              </a:rPr>
+              <a:t>외부 서비스</a:t>
+            </a:r>
+            <a:r>
+              <a:rPr lang="en-US" altLang="ko-KR" sz="1200" dirty="0">
+                <a:solidFill>
+                  <a:schemeClr val="bg1"/>
+                </a:solidFill>
+                <a:latin typeface="D2Coding" panose="020B0609020101020101" pitchFamily="49" charset="-127"/>
+                <a:ea typeface="D2Coding" panose="020B0609020101020101" pitchFamily="49" charset="-127"/>
+              </a:rPr>
+              <a:t>/DB</a:t>
+            </a:r>
+            <a:r>
+              <a:rPr lang="ko-KR" altLang="en-US" sz="1200" dirty="0">
+                <a:solidFill>
+                  <a:schemeClr val="bg1"/>
+                </a:solidFill>
+                <a:latin typeface="D2Coding" panose="020B0609020101020101" pitchFamily="49" charset="-127"/>
+                <a:ea typeface="D2Coding" panose="020B0609020101020101" pitchFamily="49" charset="-127"/>
+              </a:rPr>
+              <a:t>를 연결</a:t>
+            </a:r>
+            <a:r>
+              <a:rPr lang="en-US" altLang="ko-KR" sz="1200" dirty="0">
+                <a:solidFill>
+                  <a:schemeClr val="bg1"/>
+                </a:solidFill>
+                <a:latin typeface="D2Coding" panose="020B0609020101020101" pitchFamily="49" charset="-127"/>
+                <a:ea typeface="D2Coding" panose="020B0609020101020101" pitchFamily="49" charset="-127"/>
+              </a:rPr>
+              <a:t>) </a:t>
+            </a:r>
+          </a:p>
+          <a:p>
+            <a:pPr>
+              <a:lnSpc>
+                <a:spcPct val="150000"/>
+              </a:lnSpc>
+            </a:pPr>
+            <a:r>
+              <a:rPr lang="en-US" altLang="ko-KR" sz="1200" dirty="0">
+                <a:solidFill>
+                  <a:schemeClr val="bg1"/>
+                </a:solidFill>
+                <a:latin typeface="D2Coding" panose="020B0609020101020101" pitchFamily="49" charset="-127"/>
+                <a:ea typeface="D2Coding" panose="020B0609020101020101" pitchFamily="49" charset="-127"/>
+              </a:rPr>
+              <a:t>      └── [ Tools (</a:t>
+            </a:r>
+            <a:r>
+              <a:rPr lang="ko-KR" altLang="en-US" sz="1200" dirty="0">
+                <a:solidFill>
+                  <a:schemeClr val="bg1"/>
+                </a:solidFill>
+                <a:latin typeface="D2Coding" panose="020B0609020101020101" pitchFamily="49" charset="-127"/>
+                <a:ea typeface="D2Coding" panose="020B0609020101020101" pitchFamily="49" charset="-127"/>
+              </a:rPr>
+              <a:t>도구</a:t>
+            </a:r>
+            <a:r>
+              <a:rPr lang="en-US" altLang="ko-KR" sz="1200" dirty="0">
+                <a:solidFill>
+                  <a:schemeClr val="bg1"/>
+                </a:solidFill>
+                <a:latin typeface="D2Coding" panose="020B0609020101020101" pitchFamily="49" charset="-127"/>
+                <a:ea typeface="D2Coding" panose="020B0609020101020101" pitchFamily="49" charset="-127"/>
+              </a:rPr>
+              <a:t>/</a:t>
+            </a:r>
+            <a:r>
+              <a:rPr lang="ko-KR" altLang="en-US" sz="1200" dirty="0">
+                <a:solidFill>
+                  <a:schemeClr val="bg1"/>
+                </a:solidFill>
+                <a:latin typeface="D2Coding" panose="020B0609020101020101" pitchFamily="49" charset="-127"/>
+                <a:ea typeface="D2Coding" panose="020B0609020101020101" pitchFamily="49" charset="-127"/>
+              </a:rPr>
+              <a:t>기능 모음</a:t>
+            </a:r>
+            <a:r>
+              <a:rPr lang="en-US" altLang="ko-KR" sz="1200" dirty="0">
+                <a:solidFill>
+                  <a:schemeClr val="bg1"/>
+                </a:solidFill>
+                <a:latin typeface="D2Coding" panose="020B0609020101020101" pitchFamily="49" charset="-127"/>
+                <a:ea typeface="D2Coding" panose="020B0609020101020101" pitchFamily="49" charset="-127"/>
+              </a:rPr>
+              <a:t>) ] : Skills.md</a:t>
+            </a:r>
+          </a:p>
+          <a:p>
+            <a:pPr>
+              <a:lnSpc>
+                <a:spcPct val="150000"/>
+              </a:lnSpc>
+            </a:pPr>
+            <a:r>
+              <a:rPr lang="en-US" altLang="ko-KR" sz="1200" dirty="0">
+                <a:solidFill>
+                  <a:schemeClr val="bg1"/>
+                </a:solidFill>
+                <a:latin typeface="D2Coding" panose="020B0609020101020101" pitchFamily="49" charset="-127"/>
+                <a:ea typeface="D2Coding" panose="020B0609020101020101" pitchFamily="49" charset="-127"/>
+              </a:rPr>
+              <a:t>            ├── 1. Function Calling (JSON </a:t>
+            </a:r>
+            <a:r>
+              <a:rPr lang="ko-KR" altLang="en-US" sz="1200" dirty="0">
+                <a:solidFill>
+                  <a:schemeClr val="bg1"/>
+                </a:solidFill>
+                <a:latin typeface="D2Coding" panose="020B0609020101020101" pitchFamily="49" charset="-127"/>
+                <a:ea typeface="D2Coding" panose="020B0609020101020101" pitchFamily="49" charset="-127"/>
+              </a:rPr>
+              <a:t>기반 규격화된 호출 </a:t>
+            </a:r>
+            <a:r>
+              <a:rPr lang="en-US" altLang="ko-KR" sz="1200" dirty="0">
+                <a:solidFill>
+                  <a:schemeClr val="bg1"/>
+                </a:solidFill>
+                <a:latin typeface="D2Coding" panose="020B0609020101020101" pitchFamily="49" charset="-127"/>
+                <a:ea typeface="D2Coding" panose="020B0609020101020101" pitchFamily="49" charset="-127"/>
+              </a:rPr>
+              <a:t>- </a:t>
+            </a:r>
+            <a:r>
+              <a:rPr lang="ko-KR" altLang="en-US" sz="1200" dirty="0">
+                <a:solidFill>
+                  <a:schemeClr val="bg1"/>
+                </a:solidFill>
+                <a:latin typeface="D2Coding" panose="020B0609020101020101" pitchFamily="49" charset="-127"/>
+                <a:ea typeface="D2Coding" panose="020B0609020101020101" pitchFamily="49" charset="-127"/>
+              </a:rPr>
+              <a:t>현재 표준</a:t>
+            </a:r>
+            <a:r>
+              <a:rPr lang="en-US" altLang="ko-KR" sz="1200" dirty="0">
+                <a:solidFill>
+                  <a:schemeClr val="bg1"/>
+                </a:solidFill>
+                <a:latin typeface="D2Coding" panose="020B0609020101020101" pitchFamily="49" charset="-127"/>
+                <a:ea typeface="D2Coding" panose="020B0609020101020101" pitchFamily="49" charset="-127"/>
+              </a:rPr>
+              <a:t>)</a:t>
+            </a:r>
+          </a:p>
+          <a:p>
+            <a:pPr>
+              <a:lnSpc>
+                <a:spcPct val="150000"/>
+              </a:lnSpc>
+            </a:pPr>
+            <a:r>
+              <a:rPr lang="en-US" altLang="ko-KR" sz="1200" dirty="0">
+                <a:solidFill>
+                  <a:schemeClr val="bg1"/>
+                </a:solidFill>
+                <a:latin typeface="D2Coding" panose="020B0609020101020101" pitchFamily="49" charset="-127"/>
+                <a:ea typeface="D2Coding" panose="020B0609020101020101" pitchFamily="49" charset="-127"/>
+              </a:rPr>
+              <a:t>            ├── 2. </a:t>
+            </a:r>
+            <a:r>
+              <a:rPr lang="en-US" altLang="ko-KR" sz="1200" dirty="0" err="1">
+                <a:solidFill>
+                  <a:schemeClr val="bg1"/>
+                </a:solidFill>
+                <a:latin typeface="D2Coding" panose="020B0609020101020101" pitchFamily="49" charset="-127"/>
+                <a:ea typeface="D2Coding" panose="020B0609020101020101" pitchFamily="49" charset="-127"/>
+              </a:rPr>
+              <a:t>ReAct</a:t>
+            </a:r>
+            <a:r>
+              <a:rPr lang="en-US" altLang="ko-KR" sz="1200" dirty="0">
+                <a:solidFill>
+                  <a:schemeClr val="bg1"/>
+                </a:solidFill>
+                <a:latin typeface="D2Coding" panose="020B0609020101020101" pitchFamily="49" charset="-127"/>
+                <a:ea typeface="D2Coding" panose="020B0609020101020101" pitchFamily="49" charset="-127"/>
+              </a:rPr>
+              <a:t> / Zero-shot Prompting (</a:t>
+            </a:r>
+            <a:r>
+              <a:rPr lang="ko-KR" altLang="en-US" sz="1200" dirty="0">
+                <a:solidFill>
+                  <a:schemeClr val="bg1"/>
+                </a:solidFill>
+                <a:latin typeface="D2Coding" panose="020B0609020101020101" pitchFamily="49" charset="-127"/>
+                <a:ea typeface="D2Coding" panose="020B0609020101020101" pitchFamily="49" charset="-127"/>
+              </a:rPr>
+              <a:t>문자열 기반 텍스트 파싱</a:t>
+            </a:r>
+            <a:r>
+              <a:rPr lang="en-US" altLang="ko-KR" sz="1200" dirty="0">
+                <a:solidFill>
+                  <a:schemeClr val="bg1"/>
+                </a:solidFill>
+                <a:latin typeface="D2Coding" panose="020B0609020101020101" pitchFamily="49" charset="-127"/>
+                <a:ea typeface="D2Coding" panose="020B0609020101020101" pitchFamily="49" charset="-127"/>
+              </a:rPr>
+              <a:t>) </a:t>
+            </a:r>
+          </a:p>
+          <a:p>
+            <a:pPr>
+              <a:lnSpc>
+                <a:spcPct val="150000"/>
+              </a:lnSpc>
+            </a:pPr>
+            <a:r>
+              <a:rPr lang="en-US" altLang="ko-KR" sz="1200" dirty="0">
+                <a:solidFill>
+                  <a:schemeClr val="bg1"/>
+                </a:solidFill>
+                <a:latin typeface="D2Coding" panose="020B0609020101020101" pitchFamily="49" charset="-127"/>
+                <a:ea typeface="D2Coding" panose="020B0609020101020101" pitchFamily="49" charset="-127"/>
+              </a:rPr>
+              <a:t>            ├── 3. Code Interpreter / Dynamic Code Execution (</a:t>
+            </a:r>
+            <a:r>
+              <a:rPr lang="ko-KR" altLang="en-US" sz="1200" dirty="0">
+                <a:solidFill>
+                  <a:schemeClr val="bg1"/>
+                </a:solidFill>
+                <a:latin typeface="D2Coding" panose="020B0609020101020101" pitchFamily="49" charset="-127"/>
+                <a:ea typeface="D2Coding" panose="020B0609020101020101" pitchFamily="49" charset="-127"/>
+              </a:rPr>
+              <a:t>실시간 코드 작성 및 실행</a:t>
+            </a:r>
+            <a:r>
+              <a:rPr lang="en-US" altLang="ko-KR" sz="1200" dirty="0">
+                <a:solidFill>
+                  <a:schemeClr val="bg1"/>
+                </a:solidFill>
+                <a:latin typeface="D2Coding" panose="020B0609020101020101" pitchFamily="49" charset="-127"/>
+                <a:ea typeface="D2Coding" panose="020B0609020101020101" pitchFamily="49" charset="-127"/>
+              </a:rPr>
+              <a:t>)</a:t>
+            </a:r>
+          </a:p>
+          <a:p>
+            <a:pPr>
+              <a:lnSpc>
+                <a:spcPct val="150000"/>
+              </a:lnSpc>
+            </a:pPr>
+            <a:r>
+              <a:rPr lang="en-US" altLang="ko-KR" sz="1200" dirty="0">
+                <a:solidFill>
+                  <a:schemeClr val="bg1"/>
+                </a:solidFill>
+                <a:latin typeface="D2Coding" panose="020B0609020101020101" pitchFamily="49" charset="-127"/>
+                <a:ea typeface="D2Coding" panose="020B0609020101020101" pitchFamily="49" charset="-127"/>
+              </a:rPr>
+              <a:t>            ├── 4. </a:t>
+            </a:r>
+            <a:r>
+              <a:rPr lang="en-US" altLang="ko-KR" sz="1200" dirty="0" err="1">
+                <a:solidFill>
+                  <a:schemeClr val="bg1"/>
+                </a:solidFill>
+                <a:latin typeface="D2Coding" panose="020B0609020101020101" pitchFamily="49" charset="-127"/>
+                <a:ea typeface="D2Coding" panose="020B0609020101020101" pitchFamily="49" charset="-127"/>
+              </a:rPr>
+              <a:t>Toolformer</a:t>
+            </a:r>
+            <a:r>
+              <a:rPr lang="en-US" altLang="ko-KR" sz="1200" dirty="0">
+                <a:solidFill>
+                  <a:schemeClr val="bg1"/>
+                </a:solidFill>
+                <a:latin typeface="D2Coding" panose="020B0609020101020101" pitchFamily="49" charset="-127"/>
+                <a:ea typeface="D2Coding" panose="020B0609020101020101" pitchFamily="49" charset="-127"/>
+              </a:rPr>
+              <a:t> / API In-line Token Triggering (</a:t>
+            </a:r>
+            <a:r>
+              <a:rPr lang="ko-KR" altLang="en-US" sz="1200" dirty="0">
+                <a:solidFill>
+                  <a:schemeClr val="bg1"/>
+                </a:solidFill>
+                <a:latin typeface="D2Coding" panose="020B0609020101020101" pitchFamily="49" charset="-127"/>
+                <a:ea typeface="D2Coding" panose="020B0609020101020101" pitchFamily="49" charset="-127"/>
+              </a:rPr>
+              <a:t>토큰 단위 </a:t>
+            </a:r>
+            <a:r>
+              <a:rPr lang="en-US" altLang="ko-KR" sz="1200" dirty="0">
+                <a:solidFill>
+                  <a:schemeClr val="bg1"/>
+                </a:solidFill>
+                <a:latin typeface="D2Coding" panose="020B0609020101020101" pitchFamily="49" charset="-127"/>
+                <a:ea typeface="D2Coding" panose="020B0609020101020101" pitchFamily="49" charset="-127"/>
+              </a:rPr>
+              <a:t>API </a:t>
+            </a:r>
+            <a:r>
+              <a:rPr lang="ko-KR" altLang="en-US" sz="1200" dirty="0">
+                <a:solidFill>
+                  <a:schemeClr val="bg1"/>
+                </a:solidFill>
+                <a:latin typeface="D2Coding" panose="020B0609020101020101" pitchFamily="49" charset="-127"/>
+                <a:ea typeface="D2Coding" panose="020B0609020101020101" pitchFamily="49" charset="-127"/>
+              </a:rPr>
+              <a:t>자동 호출</a:t>
+            </a:r>
+            <a:r>
+              <a:rPr lang="en-US" altLang="ko-KR" sz="1200" dirty="0">
+                <a:solidFill>
+                  <a:schemeClr val="bg1"/>
+                </a:solidFill>
+                <a:latin typeface="D2Coding" panose="020B0609020101020101" pitchFamily="49" charset="-127"/>
+                <a:ea typeface="D2Coding" panose="020B0609020101020101" pitchFamily="49" charset="-127"/>
+              </a:rPr>
+              <a:t>)</a:t>
+            </a:r>
+          </a:p>
+          <a:p>
+            <a:pPr>
+              <a:lnSpc>
+                <a:spcPct val="150000"/>
+              </a:lnSpc>
+            </a:pPr>
+            <a:r>
+              <a:rPr lang="en-US" altLang="ko-KR" sz="1200" dirty="0">
+                <a:solidFill>
+                  <a:schemeClr val="bg1"/>
+                </a:solidFill>
+                <a:latin typeface="D2Coding" panose="020B0609020101020101" pitchFamily="49" charset="-127"/>
+                <a:ea typeface="D2Coding" panose="020B0609020101020101" pitchFamily="49" charset="-127"/>
+              </a:rPr>
+              <a:t>            └── 5. GUI / Computer Use Agent (</a:t>
+            </a:r>
+            <a:r>
+              <a:rPr lang="ko-KR" altLang="en-US" sz="1200" dirty="0">
+                <a:solidFill>
+                  <a:schemeClr val="bg1"/>
+                </a:solidFill>
+                <a:latin typeface="D2Coding" panose="020B0609020101020101" pitchFamily="49" charset="-127"/>
+                <a:ea typeface="D2Coding" panose="020B0609020101020101" pitchFamily="49" charset="-127"/>
+              </a:rPr>
+              <a:t>화면 시각 요소 직접 제어</a:t>
+            </a:r>
+            <a:r>
+              <a:rPr lang="en-US" altLang="ko-KR" sz="1200" dirty="0">
+                <a:solidFill>
+                  <a:schemeClr val="bg1"/>
+                </a:solidFill>
+                <a:latin typeface="D2Coding" panose="020B0609020101020101" pitchFamily="49" charset="-127"/>
+                <a:ea typeface="D2Coding" panose="020B0609020101020101" pitchFamily="49" charset="-127"/>
+              </a:rPr>
+              <a:t>)</a:t>
+            </a:r>
+            <a:endParaRPr lang="ko-KR" altLang="en-US" sz="1200" dirty="0">
               <a:solidFill>
                 <a:schemeClr val="bg1"/>
               </a:solidFill>
-            </a:endParaRPr>
-          </a:p>
-        </p:txBody>
-      </p:sp>
-      <p:sp>
-        <p:nvSpPr>
-          <p:cNvPr id="11" name="TextBox 10">
-            <a:extLst>
-              <a:ext uri="{FF2B5EF4-FFF2-40B4-BE49-F238E27FC236}">
-                <a16:creationId xmlns:a16="http://schemas.microsoft.com/office/drawing/2014/main" id="{9DD5190C-208C-96C0-313C-CCEE220A2C86}"/>
-              </a:ext>
-            </a:extLst>
-          </p:cNvPr>
-          <p:cNvSpPr txBox="1"/>
-          <p:nvPr/>
-        </p:nvSpPr>
-        <p:spPr>
-          <a:xfrm>
-            <a:off x="1610069" y="3596986"/>
-            <a:ext cx="2814980" cy="1077218"/>
-          </a:xfrm>
-          <a:prstGeom prst="rect">
-            <a:avLst/>
-          </a:prstGeom>
-          <a:solidFill>
-            <a:schemeClr val="tx1"/>
-          </a:solidFill>
-        </p:spPr>
-        <p:txBody>
-          <a:bodyPr wrap="square">
-            <a:spAutoFit/>
-          </a:bodyPr>
-          <a:lstStyle/>
-          <a:p>
-            <a:pPr marL="285750" indent="-285750">
-              <a:buFont typeface="Wingdings" panose="05000000000000000000" pitchFamily="2" charset="2"/>
-              <a:buChar char="ü"/>
-            </a:pPr>
-            <a:r>
-              <a:rPr lang="en-US" altLang="ko-KR" sz="1600" cap="none" dirty="0">
-                <a:solidFill>
-                  <a:schemeClr val="bg1"/>
-                </a:solidFill>
-                <a:latin typeface="D2Coding" panose="020B0609020101020101" pitchFamily="49" charset="-127"/>
-                <a:ea typeface="D2Coding" panose="020B0609020101020101" pitchFamily="49" charset="-127"/>
-                <a:cs typeface="Segoe UI Light" panose="020B0502040204020203" pitchFamily="34" charset="0"/>
-              </a:rPr>
-              <a:t>Function Calling</a:t>
-            </a:r>
-          </a:p>
-          <a:p>
-            <a:pPr marL="285750" indent="-285750">
-              <a:buFont typeface="Wingdings" panose="05000000000000000000" pitchFamily="2" charset="2"/>
-              <a:buChar char="ü"/>
-            </a:pPr>
-            <a:r>
-              <a:rPr lang="en-US" altLang="ko-KR" sz="1600" dirty="0">
-                <a:solidFill>
-                  <a:schemeClr val="bg1"/>
-                </a:solidFill>
-                <a:latin typeface="D2Coding" panose="020B0609020101020101" pitchFamily="49" charset="-127"/>
-                <a:ea typeface="D2Coding" panose="020B0609020101020101" pitchFamily="49" charset="-127"/>
-                <a:cs typeface="Segoe UI Light" panose="020B0502040204020203" pitchFamily="34" charset="0"/>
-              </a:rPr>
-              <a:t>Tools</a:t>
-            </a:r>
-          </a:p>
-          <a:p>
-            <a:pPr marL="285750" indent="-285750">
-              <a:buFont typeface="Wingdings" panose="05000000000000000000" pitchFamily="2" charset="2"/>
-              <a:buChar char="ü"/>
-            </a:pPr>
-            <a:r>
-              <a:rPr lang="en-US" altLang="ko-KR" sz="1600" dirty="0">
-                <a:solidFill>
-                  <a:schemeClr val="bg1"/>
-                </a:solidFill>
-                <a:latin typeface="D2Coding" panose="020B0609020101020101" pitchFamily="49" charset="-127"/>
-                <a:ea typeface="D2Coding" panose="020B0609020101020101" pitchFamily="49" charset="-127"/>
-                <a:cs typeface="Segoe UI Light" panose="020B0502040204020203" pitchFamily="34" charset="0"/>
-              </a:rPr>
-              <a:t>Agent</a:t>
-            </a:r>
-          </a:p>
-          <a:p>
-            <a:pPr marL="285750" indent="-285750">
-              <a:buFont typeface="Wingdings" panose="05000000000000000000" pitchFamily="2" charset="2"/>
-              <a:buChar char="ü"/>
-            </a:pPr>
-            <a:r>
-              <a:rPr lang="en-US" altLang="ko-KR" sz="1600" dirty="0">
-                <a:solidFill>
-                  <a:schemeClr val="bg1"/>
-                </a:solidFill>
-                <a:latin typeface="D2Coding" panose="020B0609020101020101" pitchFamily="49" charset="-127"/>
-                <a:ea typeface="D2Coding" panose="020B0609020101020101" pitchFamily="49" charset="-127"/>
-                <a:cs typeface="Segoe UI Light" panose="020B0502040204020203" pitchFamily="34" charset="0"/>
-              </a:rPr>
-              <a:t>MCP</a:t>
-            </a:r>
-            <a:endParaRPr lang="ko-KR" altLang="en-US" sz="1600" dirty="0">
-              <a:solidFill>
-                <a:schemeClr val="bg1"/>
-              </a:solidFill>
+              <a:latin typeface="D2Coding" panose="020B0609020101020101" pitchFamily="49" charset="-127"/>
+              <a:ea typeface="D2Coding" panose="020B0609020101020101" pitchFamily="49" charset="-127"/>
             </a:endParaRPr>
           </a:p>
         </p:txBody>
@@ -8060,12 +9118,17 @@
         </p:blipFill>
         <p:spPr>
           <a:xfrm>
-            <a:off x="4453812" y="2943111"/>
-            <a:ext cx="1798476" cy="2629128"/>
+            <a:off x="1967787" y="2200047"/>
+            <a:ext cx="2511616" cy="3671642"/>
           </a:xfrm>
           <a:prstGeom prst="rect">
             <a:avLst/>
           </a:prstGeom>
+          <a:ln>
+            <a:solidFill>
+              <a:schemeClr val="tx1"/>
+            </a:solidFill>
+          </a:ln>
         </p:spPr>
       </p:pic>
       <p:sp>
@@ -8082,13 +9145,18 @@
         </p:nvSpPr>
         <p:spPr>
           <a:xfrm>
-            <a:off x="571500" y="1266711"/>
-            <a:ext cx="11087100" cy="1162498"/>
+            <a:off x="5055604" y="2566398"/>
+            <a:ext cx="5086350" cy="1501052"/>
           </a:xfrm>
           <a:prstGeom prst="rect">
             <a:avLst/>
           </a:prstGeom>
           <a:noFill/>
+          <a:ln>
+            <a:solidFill>
+              <a:schemeClr val="tx1"/>
+            </a:solidFill>
+          </a:ln>
         </p:spPr>
         <p:txBody>
           <a:bodyPr wrap="square">
@@ -8096,122 +9164,194 @@
           </a:bodyPr>
           <a:lstStyle/>
           <a:p>
-            <a:pPr>
+            <a:pPr marL="285750" indent="-285750">
               <a:lnSpc>
-                <a:spcPct val="150000"/>
+                <a:spcPct val="200000"/>
               </a:lnSpc>
+              <a:buFont typeface="Wingdings" panose="05000000000000000000" pitchFamily="2" charset="2"/>
+              <a:buChar char="v"/>
             </a:pPr>
             <a:r>
+              <a:rPr lang="ko-KR" altLang="en-US" sz="1600" dirty="0" err="1">
+                <a:latin typeface="D2Coding" panose="020B0609020101020101" pitchFamily="49" charset="-127"/>
+                <a:ea typeface="D2Coding" panose="020B0609020101020101" pitchFamily="49" charset="-127"/>
+              </a:rPr>
+              <a:t>노션</a:t>
+            </a:r>
+            <a:r>
+              <a:rPr lang="en-US" altLang="ko-KR" sz="1600" dirty="0">
+                <a:latin typeface="D2Coding" panose="020B0609020101020101" pitchFamily="49" charset="-127"/>
+                <a:ea typeface="D2Coding" panose="020B0609020101020101" pitchFamily="49" charset="-127"/>
+              </a:rPr>
+              <a:t>(Notion)</a:t>
+            </a:r>
+            <a:r>
               <a:rPr lang="ko-KR" altLang="en-US" sz="1600" dirty="0">
                 <a:latin typeface="D2Coding" panose="020B0609020101020101" pitchFamily="49" charset="-127"/>
                 <a:ea typeface="D2Coding" panose="020B0609020101020101" pitchFamily="49" charset="-127"/>
               </a:rPr>
-              <a:t>문서 작성 소프트웨어인 </a:t>
-            </a:r>
-            <a:r>
-              <a:rPr lang="ko-KR" altLang="en-US" sz="1600" dirty="0" err="1">
-                <a:latin typeface="D2Coding" panose="020B0609020101020101" pitchFamily="49" charset="-127"/>
-                <a:ea typeface="D2Coding" panose="020B0609020101020101" pitchFamily="49" charset="-127"/>
-              </a:rPr>
-              <a:t>노션</a:t>
+              <a:t>에 요약 및 번역</a:t>
+            </a:r>
+            <a:endParaRPr lang="en-US" altLang="ko-KR" sz="1600" dirty="0">
+              <a:latin typeface="D2Coding" panose="020B0609020101020101" pitchFamily="49" charset="-127"/>
+              <a:ea typeface="D2Coding" panose="020B0609020101020101" pitchFamily="49" charset="-127"/>
+            </a:endParaRPr>
+          </a:p>
+          <a:p>
+            <a:pPr marL="285750" indent="-285750">
+              <a:lnSpc>
+                <a:spcPct val="200000"/>
+              </a:lnSpc>
+              <a:buFont typeface="Wingdings" panose="05000000000000000000" pitchFamily="2" charset="2"/>
+              <a:buChar char="v"/>
+            </a:pPr>
+            <a:r>
+              <a:rPr lang="ko-KR" altLang="en-US" sz="1600" dirty="0">
+                <a:latin typeface="D2Coding" panose="020B0609020101020101" pitchFamily="49" charset="-127"/>
+                <a:ea typeface="D2Coding" panose="020B0609020101020101" pitchFamily="49" charset="-127"/>
+              </a:rPr>
+              <a:t>단순한 </a:t>
             </a:r>
             <a:r>
               <a:rPr lang="en-US" altLang="ko-KR" sz="1600" dirty="0">
                 <a:latin typeface="D2Coding" panose="020B0609020101020101" pitchFamily="49" charset="-127"/>
                 <a:ea typeface="D2Coding" panose="020B0609020101020101" pitchFamily="49" charset="-127"/>
               </a:rPr>
-              <a:t>(Notion)</a:t>
+              <a:t>SQL </a:t>
             </a:r>
             <a:r>
               <a:rPr lang="ko-KR" altLang="en-US" sz="1600" dirty="0">
                 <a:latin typeface="D2Coding" panose="020B0609020101020101" pitchFamily="49" charset="-127"/>
                 <a:ea typeface="D2Coding" panose="020B0609020101020101" pitchFamily="49" charset="-127"/>
               </a:rPr>
-              <a:t>에서 볼 수 있는 요약 및 번역과 같은 </a:t>
+              <a:t>쿼리 생성</a:t>
+            </a:r>
+            <a:endParaRPr lang="en-US" altLang="ko-KR" sz="1600" dirty="0">
+              <a:latin typeface="D2Coding" panose="020B0609020101020101" pitchFamily="49" charset="-127"/>
+              <a:ea typeface="D2Coding" panose="020B0609020101020101" pitchFamily="49" charset="-127"/>
+            </a:endParaRPr>
+          </a:p>
+          <a:p>
+            <a:pPr marL="285750" indent="-285750">
+              <a:lnSpc>
+                <a:spcPct val="200000"/>
+              </a:lnSpc>
+              <a:buFont typeface="Wingdings" panose="05000000000000000000" pitchFamily="2" charset="2"/>
+              <a:buChar char="v"/>
+            </a:pPr>
+            <a:r>
+              <a:rPr lang="ko-KR" altLang="en-US" sz="1600" dirty="0">
+                <a:latin typeface="D2Coding" panose="020B0609020101020101" pitchFamily="49" charset="-127"/>
+                <a:ea typeface="D2Coding" panose="020B0609020101020101" pitchFamily="49" charset="-127"/>
+              </a:rPr>
+              <a:t>정해진</a:t>
             </a:r>
             <a:r>
               <a:rPr lang="en-US" altLang="ko-KR" sz="1600" dirty="0">
                 <a:latin typeface="D2Coding" panose="020B0609020101020101" pitchFamily="49" charset="-127"/>
                 <a:ea typeface="D2Coding" panose="020B0609020101020101" pitchFamily="49" charset="-127"/>
               </a:rPr>
-              <a:t>AI </a:t>
+              <a:t> UX</a:t>
             </a:r>
             <a:r>
               <a:rPr lang="ko-KR" altLang="en-US" sz="1600" dirty="0">
                 <a:latin typeface="D2Coding" panose="020B0609020101020101" pitchFamily="49" charset="-127"/>
                 <a:ea typeface="D2Coding" panose="020B0609020101020101" pitchFamily="49" charset="-127"/>
               </a:rPr>
-              <a:t>기반 기능은 단 한 번의 </a:t>
-            </a:r>
-            <a:r>
-              <a:rPr lang="en-US" altLang="ko-KR" sz="1600" dirty="0">
+              <a:t>와 대상 사용자에 따라 답변</a:t>
+            </a:r>
+          </a:p>
+        </p:txBody>
+      </p:sp>
+      <p:sp>
+        <p:nvSpPr>
+          <p:cNvPr id="8" name="TextBox 7">
+            <a:extLst>
+              <a:ext uri="{FF2B5EF4-FFF2-40B4-BE49-F238E27FC236}">
+                <a16:creationId xmlns:a16="http://schemas.microsoft.com/office/drawing/2014/main" id="{DE970E77-0ED3-DE4D-FFAA-7CAFC32C0562}"/>
+              </a:ext>
+            </a:extLst>
+          </p:cNvPr>
+          <p:cNvSpPr txBox="1"/>
+          <p:nvPr/>
+        </p:nvSpPr>
+        <p:spPr>
+          <a:xfrm>
+            <a:off x="5051793" y="2197066"/>
+            <a:ext cx="5103495" cy="369332"/>
+          </a:xfrm>
+          <a:prstGeom prst="rect">
+            <a:avLst/>
+          </a:prstGeom>
+          <a:solidFill>
+            <a:schemeClr val="tx1"/>
+          </a:solidFill>
+        </p:spPr>
+        <p:txBody>
+          <a:bodyPr wrap="square">
+            <a:spAutoFit/>
+          </a:bodyPr>
+          <a:lstStyle/>
+          <a:p>
+            <a:r>
+              <a:rPr lang="ko-KR" altLang="en-US" dirty="0">
+                <a:solidFill>
+                  <a:schemeClr val="bg1"/>
+                </a:solidFill>
                 <a:latin typeface="D2Coding" panose="020B0609020101020101" pitchFamily="49" charset="-127"/>
                 <a:ea typeface="D2Coding" panose="020B0609020101020101" pitchFamily="49" charset="-127"/>
               </a:rPr>
               <a:t>LLM </a:t>
             </a:r>
             <a:r>
-              <a:rPr lang="ko-KR" altLang="en-US" sz="1600" dirty="0">
-                <a:latin typeface="D2Coding" panose="020B0609020101020101" pitchFamily="49" charset="-127"/>
-                <a:ea typeface="D2Coding" panose="020B0609020101020101" pitchFamily="49" charset="-127"/>
-              </a:rPr>
-              <a:t>호출로 작동할 수 있으며</a:t>
-            </a:r>
-            <a:r>
-              <a:rPr lang="en-US" altLang="ko-KR" sz="1600" dirty="0">
+              <a:rPr lang="ko-KR" altLang="en-US" dirty="0" err="1">
+                <a:solidFill>
+                  <a:schemeClr val="bg1"/>
+                </a:solidFill>
+                <a:latin typeface="D2Coding" panose="020B0609020101020101" pitchFamily="49" charset="-127"/>
+                <a:ea typeface="D2Coding" panose="020B0609020101020101" pitchFamily="49" charset="-127"/>
+              </a:rPr>
+              <a:t>Call</a:t>
+            </a:r>
+            <a:r>
+              <a:rPr lang="ko-KR" altLang="en-US" dirty="0">
+                <a:solidFill>
+                  <a:schemeClr val="bg1"/>
+                </a:solidFill>
                 <a:latin typeface="D2Coding" panose="020B0609020101020101" pitchFamily="49" charset="-127"/>
                 <a:ea typeface="D2Coding" panose="020B0609020101020101" pitchFamily="49" charset="-127"/>
               </a:rPr>
               <a:t> </a:t>
             </a:r>
             <a:r>
-              <a:rPr lang="ko-KR" altLang="en-US" sz="1600" dirty="0">
-                <a:latin typeface="D2Coding" panose="020B0609020101020101" pitchFamily="49" charset="-127"/>
-                <a:ea typeface="D2Coding" panose="020B0609020101020101" pitchFamily="49" charset="-127"/>
-              </a:rPr>
-              <a:t>단순한 </a:t>
-            </a:r>
-            <a:r>
-              <a:rPr lang="en-US" altLang="ko-KR" sz="1600" dirty="0">
-                <a:latin typeface="D2Coding" panose="020B0609020101020101" pitchFamily="49" charset="-127"/>
-                <a:ea typeface="D2Coding" panose="020B0609020101020101" pitchFamily="49" charset="-127"/>
-              </a:rPr>
-              <a:t>SQL </a:t>
-            </a:r>
-            <a:r>
-              <a:rPr lang="ko-KR" altLang="en-US" sz="1600" dirty="0">
-                <a:latin typeface="D2Coding" panose="020B0609020101020101" pitchFamily="49" charset="-127"/>
-                <a:ea typeface="D2Coding" panose="020B0609020101020101" pitchFamily="49" charset="-127"/>
-              </a:rPr>
-              <a:t>쿼리 생성 역시 개발자가 염두에 둔 </a:t>
-            </a:r>
-            <a:r>
-              <a:rPr lang="en-US" altLang="ko-KR" sz="1600" dirty="0">
-                <a:latin typeface="D2Coding" panose="020B0609020101020101" pitchFamily="49" charset="-127"/>
-                <a:ea typeface="D2Coding" panose="020B0609020101020101" pitchFamily="49" charset="-127"/>
-              </a:rPr>
-              <a:t>UX</a:t>
-            </a:r>
-            <a:r>
-              <a:rPr lang="ko-KR" altLang="en-US" sz="1600" dirty="0">
-                <a:latin typeface="D2Coding" panose="020B0609020101020101" pitchFamily="49" charset="-127"/>
-                <a:ea typeface="D2Coding" panose="020B0609020101020101" pitchFamily="49" charset="-127"/>
-              </a:rPr>
-              <a:t>와 대상 사용자에 따라 단 한 번의 </a:t>
-            </a:r>
-            <a:r>
-              <a:rPr lang="en-US" altLang="ko-KR" sz="1600" dirty="0">
-                <a:latin typeface="D2Coding" panose="020B0609020101020101" pitchFamily="49" charset="-127"/>
-                <a:ea typeface="D2Coding" panose="020B0609020101020101" pitchFamily="49" charset="-127"/>
-              </a:rPr>
-              <a:t>LLM </a:t>
-            </a:r>
-            <a:r>
-              <a:rPr lang="ko-KR" altLang="en-US" sz="1600" dirty="0">
-                <a:latin typeface="D2Coding" panose="020B0609020101020101" pitchFamily="49" charset="-127"/>
-                <a:ea typeface="D2Coding" panose="020B0609020101020101" pitchFamily="49" charset="-127"/>
-              </a:rPr>
-              <a:t>호출로 작동할 수 있음</a:t>
+              <a:rPr lang="en-US" altLang="ko-KR" dirty="0">
+                <a:solidFill>
+                  <a:schemeClr val="bg1"/>
+                </a:solidFill>
+                <a:latin typeface="D2Coding" panose="020B0609020101020101" pitchFamily="49" charset="-127"/>
+                <a:ea typeface="D2Coding" panose="020B0609020101020101" pitchFamily="49" charset="-127"/>
+              </a:rPr>
+              <a:t>: </a:t>
+            </a:r>
+            <a:r>
+              <a:rPr lang="ko-KR" altLang="en-US" dirty="0" err="1">
+                <a:solidFill>
+                  <a:schemeClr val="bg1"/>
+                </a:solidFill>
+                <a:latin typeface="D2Coding" panose="020B0609020101020101" pitchFamily="49" charset="-127"/>
+                <a:ea typeface="D2Coding" panose="020B0609020101020101" pitchFamily="49" charset="-127"/>
+              </a:rPr>
+              <a:t>LLM을</a:t>
+            </a:r>
+            <a:r>
+              <a:rPr lang="ko-KR" altLang="en-US" dirty="0">
+                <a:solidFill>
+                  <a:schemeClr val="bg1"/>
+                </a:solidFill>
+                <a:latin typeface="D2Coding" panose="020B0609020101020101" pitchFamily="49" charset="-127"/>
+                <a:ea typeface="D2Coding" panose="020B0609020101020101" pitchFamily="49" charset="-127"/>
+              </a:rPr>
+              <a:t> 한 번만 호출</a:t>
             </a:r>
           </a:p>
         </p:txBody>
